--- a/教育（塾）業界_施策の設計図_16x9.pptx
+++ b/教育（塾）業界_施策の設計図_16x9.pptx
@@ -4773,7 +4773,7 @@
                 <a:ea typeface="メイリオ"/>
                 <a:cs typeface="メイリオ"/>
               </a:rPr>
-              <a:t>どこで、何を訴求して、月に何人がLINEの友だちになるか（1教室あたりのモデル値）</a:t>
+              <a:t>どこで、何を訴求して、月に何人がLINEの友だちになるか（中堅チェーンの本部アカウント1つのモデル値）</a:t>
             </a:r>
           </a:p>
         </p:txBody>
@@ -4861,7 +4861,7 @@
                 <a:ea typeface="メイリオ"/>
                 <a:cs typeface="メイリオ"/>
               </a:rPr>
-              <a:t>※友だち追加数は1教室あたりのモデル値（例）。費用は税抜。離脱防止ポップアップはSitelead等のツールを使う</a:t>
+              <a:t>※友だち追加数は中堅チェーンの本部アカウント1つのモデル値（例）。チラシ・教室のQRは計測できないため数えていない。費用は税抜</a:t>
             </a:r>
           </a:p>
         </p:txBody>
@@ -5094,8 +5094,8 @@
         </p:nvSpPr>
         <p:spPr>
           <a:xfrm>
-            <a:off x="432000" y="1925999"/>
-            <a:ext cx="2808000" cy="882000"/>
+            <a:off x="432000" y="1944000"/>
+            <a:ext cx="2808000" cy="1260000"/>
           </a:xfrm>
           <a:prstGeom prst="rect">
             <a:avLst/>
@@ -5140,7 +5140,7 @@
         </p:nvSpPr>
         <p:spPr>
           <a:xfrm>
-            <a:off x="540000" y="2141999"/>
+            <a:off x="540000" y="2350800"/>
             <a:ext cx="503999" cy="450000"/>
           </a:xfrm>
           <a:prstGeom prst="ellipse">
@@ -5195,8 +5195,8 @@
         </p:nvSpPr>
         <p:spPr>
           <a:xfrm>
-            <a:off x="1115999" y="1925999"/>
-            <a:ext cx="2106000" cy="882000"/>
+            <a:off x="1115999" y="1944000"/>
+            <a:ext cx="2106000" cy="1260000"/>
           </a:xfrm>
           <a:prstGeom prst="rect">
             <a:avLst/>
@@ -5248,7 +5248,7 @@
         </p:nvCxnSpPr>
         <p:spPr>
           <a:xfrm>
-            <a:off x="3257999" y="2366999"/>
+            <a:off x="3257999" y="2574000"/>
             <a:ext cx="216000" cy="0"/>
           </a:xfrm>
           <a:prstGeom prst="line">
@@ -5284,8 +5284,8 @@
         </p:nvSpPr>
         <p:spPr>
           <a:xfrm>
-            <a:off x="3491999" y="1925999"/>
-            <a:ext cx="4356000" cy="882000"/>
+            <a:off x="3491999" y="1944000"/>
+            <a:ext cx="4356000" cy="1260000"/>
           </a:xfrm>
           <a:prstGeom prst="rect">
             <a:avLst/>
@@ -5341,7 +5341,7 @@
         </p:nvCxnSpPr>
         <p:spPr>
           <a:xfrm>
-            <a:off x="7865999" y="2366999"/>
+            <a:off x="7865999" y="2574000"/>
             <a:ext cx="198000" cy="0"/>
           </a:xfrm>
           <a:prstGeom prst="line">
@@ -5377,8 +5377,8 @@
         </p:nvSpPr>
         <p:spPr>
           <a:xfrm>
-            <a:off x="8082000" y="1925999"/>
-            <a:ext cx="1565999" cy="882000"/>
+            <a:off x="8082000" y="1944000"/>
+            <a:ext cx="1565999" cy="1260000"/>
           </a:xfrm>
           <a:prstGeom prst="rect">
             <a:avLst/>
@@ -5411,7 +5411,7 @@
           <a:p>
             <a:pPr algn="ctr"/>
             <a:r>
-              <a:rPr sz="2600" b="1">
+              <a:rPr sz="2400" b="1">
                 <a:solidFill>
                   <a:srgbClr val="FFFFFF"/>
                 </a:solidFill>
@@ -5419,7 +5419,7 @@
                 <a:ea typeface="メイリオ"/>
                 <a:cs typeface="メイリオ"/>
               </a:rPr>
-              <a:t>200人</a:t>
+              <a:t>2,200人</a:t>
             </a:r>
           </a:p>
           <a:p>
@@ -5446,8 +5446,8 @@
         </p:nvSpPr>
         <p:spPr>
           <a:xfrm>
-            <a:off x="9720000" y="1925999"/>
-            <a:ext cx="1969200" cy="882000"/>
+            <a:off x="9720000" y="1944000"/>
+            <a:ext cx="1969200" cy="1260000"/>
           </a:xfrm>
           <a:prstGeom prst="rect">
             <a:avLst/>
@@ -5517,8 +5517,8 @@
         </p:nvSpPr>
         <p:spPr>
           <a:xfrm>
-            <a:off x="432000" y="2916000"/>
-            <a:ext cx="2808000" cy="882000"/>
+            <a:off x="432000" y="3348000"/>
+            <a:ext cx="2808000" cy="1260000"/>
           </a:xfrm>
           <a:prstGeom prst="rect">
             <a:avLst/>
@@ -5563,7 +5563,7 @@
         </p:nvSpPr>
         <p:spPr>
           <a:xfrm>
-            <a:off x="540000" y="3131999"/>
+            <a:off x="540000" y="3754800"/>
             <a:ext cx="503999" cy="450000"/>
           </a:xfrm>
           <a:prstGeom prst="ellipse">
@@ -5618,8 +5618,8 @@
         </p:nvSpPr>
         <p:spPr>
           <a:xfrm>
-            <a:off x="1115999" y="2916000"/>
-            <a:ext cx="2106000" cy="882000"/>
+            <a:off x="1115999" y="3348000"/>
+            <a:ext cx="2106000" cy="1260000"/>
           </a:xfrm>
           <a:prstGeom prst="rect">
             <a:avLst/>
@@ -5671,7 +5671,7 @@
         </p:nvCxnSpPr>
         <p:spPr>
           <a:xfrm>
-            <a:off x="3257999" y="3356999"/>
+            <a:off x="3257999" y="3978000"/>
             <a:ext cx="216000" cy="0"/>
           </a:xfrm>
           <a:prstGeom prst="line">
@@ -5707,8 +5707,8 @@
         </p:nvSpPr>
         <p:spPr>
           <a:xfrm>
-            <a:off x="3491999" y="2916000"/>
-            <a:ext cx="4356000" cy="882000"/>
+            <a:off x="3491999" y="3348000"/>
+            <a:ext cx="4356000" cy="1260000"/>
           </a:xfrm>
           <a:prstGeom prst="rect">
             <a:avLst/>
@@ -5764,7 +5764,7 @@
         </p:nvCxnSpPr>
         <p:spPr>
           <a:xfrm>
-            <a:off x="7865999" y="3356999"/>
+            <a:off x="7865999" y="3978000"/>
             <a:ext cx="198000" cy="0"/>
           </a:xfrm>
           <a:prstGeom prst="line">
@@ -5800,8 +5800,8 @@
         </p:nvSpPr>
         <p:spPr>
           <a:xfrm>
-            <a:off x="8082000" y="2916000"/>
-            <a:ext cx="1565999" cy="882000"/>
+            <a:off x="8082000" y="3348000"/>
+            <a:ext cx="1565999" cy="1260000"/>
           </a:xfrm>
           <a:prstGeom prst="rect">
             <a:avLst/>
@@ -5834,7 +5834,7 @@
           <a:p>
             <a:pPr algn="ctr"/>
             <a:r>
-              <a:rPr sz="2600" b="1">
+              <a:rPr sz="2400" b="1">
                 <a:solidFill>
                   <a:srgbClr val="FFFFFF"/>
                 </a:solidFill>
@@ -5842,7 +5842,7 @@
                 <a:ea typeface="メイリオ"/>
                 <a:cs typeface="メイリオ"/>
               </a:rPr>
-              <a:t>30人</a:t>
+              <a:t>300人</a:t>
             </a:r>
           </a:p>
           <a:p>
@@ -5869,8 +5869,8 @@
         </p:nvSpPr>
         <p:spPr>
           <a:xfrm>
-            <a:off x="9720000" y="2916000"/>
-            <a:ext cx="1969200" cy="882000"/>
+            <a:off x="9720000" y="3348000"/>
+            <a:ext cx="1969200" cy="1260000"/>
           </a:xfrm>
           <a:prstGeom prst="rect">
             <a:avLst/>
@@ -5934,300 +5934,19 @@
       </p:sp>
       <p:sp>
         <p:nvSpPr>
-          <p:cNvPr id="34" name="Rectangle 33"/>
+          <p:cNvPr id="34" name="Rounded Rectangle 33"/>
           <p:cNvSpPr/>
           <p:nvPr/>
         </p:nvSpPr>
         <p:spPr>
           <a:xfrm>
-            <a:off x="432000" y="3906000"/>
-            <a:ext cx="2808000" cy="882000"/>
-          </a:xfrm>
-          <a:prstGeom prst="rect">
-            <a:avLst/>
-          </a:prstGeom>
-          <a:solidFill>
-            <a:srgbClr val="FFFFFF"/>
-          </a:solidFill>
-          <a:ln w="15875">
-            <a:solidFill>
-              <a:srgbClr val="8EA9DB"/>
-            </a:solidFill>
-          </a:ln>
-          <a:effectLst/>
-        </p:spPr>
-        <p:style>
-          <a:lnRef idx="1">
-            <a:schemeClr val="accent1"/>
-          </a:lnRef>
-          <a:fillRef idx="3">
-            <a:schemeClr val="accent1"/>
-          </a:fillRef>
-          <a:effectRef idx="2">
-            <a:schemeClr val="accent1"/>
-          </a:effectRef>
-          <a:fontRef idx="minor">
-            <a:schemeClr val="lt1"/>
-          </a:fontRef>
-        </p:style>
-        <p:txBody>
-          <a:bodyPr rtlCol="0" anchor="ctr" wrap="square" lIns="90000" rIns="90000" tIns="18000" bIns="18000"/>
-          <a:lstStyle/>
-          <a:p>
-            <a:pPr algn="ctr"/>
-          </a:p>
-        </p:txBody>
-      </p:sp>
-      <p:sp>
-        <p:nvSpPr>
-          <p:cNvPr id="35" name="Oval 34"/>
-          <p:cNvSpPr/>
-          <p:nvPr/>
-        </p:nvSpPr>
-        <p:spPr>
-          <a:xfrm>
-            <a:off x="540000" y="4121999"/>
-            <a:ext cx="503999" cy="450000"/>
-          </a:xfrm>
-          <a:prstGeom prst="ellipse">
-            <a:avLst/>
-          </a:prstGeom>
-          <a:solidFill>
-            <a:srgbClr val="1F285A"/>
-          </a:solidFill>
-          <a:ln>
-            <a:noFill/>
-          </a:ln>
-          <a:effectLst/>
-        </p:spPr>
-        <p:style>
-          <a:lnRef idx="1">
-            <a:schemeClr val="accent1"/>
-          </a:lnRef>
-          <a:fillRef idx="3">
-            <a:schemeClr val="accent1"/>
-          </a:fillRef>
-          <a:effectRef idx="2">
-            <a:schemeClr val="accent1"/>
-          </a:effectRef>
-          <a:fontRef idx="minor">
-            <a:schemeClr val="lt1"/>
-          </a:fontRef>
-        </p:style>
-        <p:txBody>
-          <a:bodyPr rtlCol="0" anchor="ctr" wrap="square" lIns="7200" rIns="7200" tIns="18000" bIns="18000"/>
-          <a:lstStyle/>
-          <a:p>
-            <a:pPr algn="ctr"/>
-            <a:r>
-              <a:rPr sz="1600" b="1">
-                <a:solidFill>
-                  <a:srgbClr val="FFFFFF"/>
-                </a:solidFill>
-                <a:latin typeface="メイリオ"/>
-                <a:ea typeface="メイリオ"/>
-                <a:cs typeface="メイリオ"/>
-              </a:rPr>
-              <a:t>02</a:t>
-            </a:r>
-          </a:p>
-        </p:txBody>
-      </p:sp>
-      <p:sp>
-        <p:nvSpPr>
-          <p:cNvPr id="36" name="Rectangle 35"/>
-          <p:cNvSpPr/>
-          <p:nvPr/>
-        </p:nvSpPr>
-        <p:spPr>
-          <a:xfrm>
-            <a:off x="1115999" y="3906000"/>
-            <a:ext cx="2106000" cy="882000"/>
-          </a:xfrm>
-          <a:prstGeom prst="rect">
-            <a:avLst/>
-          </a:prstGeom>
-          <a:noFill/>
-          <a:ln>
-            <a:noFill/>
-          </a:ln>
-          <a:effectLst/>
-        </p:spPr>
-        <p:style>
-          <a:lnRef idx="1">
-            <a:schemeClr val="accent1"/>
-          </a:lnRef>
-          <a:fillRef idx="3">
-            <a:schemeClr val="accent1"/>
-          </a:fillRef>
-          <a:effectRef idx="2">
-            <a:schemeClr val="accent1"/>
-          </a:effectRef>
-          <a:fontRef idx="minor">
-            <a:schemeClr val="lt1"/>
-          </a:fontRef>
-        </p:style>
-        <p:txBody>
-          <a:bodyPr rtlCol="0" anchor="ctr" wrap="square" lIns="18000" rIns="18000" tIns="18000" bIns="18000"/>
-          <a:lstStyle/>
-          <a:p>
-            <a:pPr algn="l"/>
-            <a:r>
-              <a:rPr sz="1500" b="1">
-                <a:solidFill>
-                  <a:srgbClr val="1F285A"/>
-                </a:solidFill>
-                <a:latin typeface="メイリオ"/>
-                <a:ea typeface="メイリオ"/>
-                <a:cs typeface="メイリオ"/>
-              </a:rPr>
-              <a:t>チラシ・教室のQR</a:t>
-            </a:r>
-          </a:p>
-        </p:txBody>
-      </p:sp>
-      <p:cxnSp>
-        <p:nvCxnSpPr>
-          <p:cNvPr id="37" name="Connector 36"/>
-          <p:cNvCxnSpPr/>
-          <p:nvPr/>
-        </p:nvCxnSpPr>
-        <p:spPr>
-          <a:xfrm>
-            <a:off x="3257999" y="4347000"/>
-            <a:ext cx="216000" cy="0"/>
-          </a:xfrm>
-          <a:prstGeom prst="line">
-            <a:avLst/>
-          </a:prstGeom>
-          <a:ln w="31750">
-            <a:solidFill>
-              <a:srgbClr val="1F285A"/>
-            </a:solidFill>
-            <a:tailEnd type="triangle"/>
-          </a:ln>
-        </p:spPr>
-        <p:style>
-          <a:lnRef idx="2">
-            <a:schemeClr val="accent1"/>
-          </a:lnRef>
-          <a:fillRef idx="0">
-            <a:schemeClr val="accent1"/>
-          </a:fillRef>
-          <a:effectRef idx="1">
-            <a:schemeClr val="accent1"/>
-          </a:effectRef>
-          <a:fontRef idx="minor">
-            <a:schemeClr val="tx1"/>
-          </a:fontRef>
-        </p:style>
-      </p:cxnSp>
-      <p:sp>
-        <p:nvSpPr>
-          <p:cNvPr id="38" name="Rectangle 37"/>
-          <p:cNvSpPr/>
-          <p:nvPr/>
-        </p:nvSpPr>
-        <p:spPr>
-          <a:xfrm>
-            <a:off x="3491999" y="3906000"/>
-            <a:ext cx="4356000" cy="882000"/>
-          </a:xfrm>
-          <a:prstGeom prst="rect">
-            <a:avLst/>
-          </a:prstGeom>
-          <a:solidFill>
-            <a:srgbClr val="FFFFFF"/>
-          </a:solidFill>
-          <a:ln w="15875">
-            <a:solidFill>
-              <a:srgbClr val="8EA9DB"/>
-            </a:solidFill>
-          </a:ln>
-          <a:effectLst/>
-        </p:spPr>
-        <p:style>
-          <a:lnRef idx="1">
-            <a:schemeClr val="accent1"/>
-          </a:lnRef>
-          <a:fillRef idx="3">
-            <a:schemeClr val="accent1"/>
-          </a:fillRef>
-          <a:effectRef idx="2">
-            <a:schemeClr val="accent1"/>
-          </a:effectRef>
-          <a:fontRef idx="minor">
-            <a:schemeClr val="lt1"/>
-          </a:fontRef>
-        </p:style>
-        <p:txBody>
-          <a:bodyPr rtlCol="0" anchor="ctr" wrap="square" lIns="180000" rIns="180000" tIns="18000" bIns="18000"/>
-          <a:lstStyle/>
-          <a:p>
-            <a:pPr algn="l"/>
-            <a:r>
-              <a:rPr sz="1700" b="1">
-                <a:solidFill>
-                  <a:srgbClr val="333333"/>
-                </a:solidFill>
-                <a:latin typeface="メイリオ"/>
-                <a:ea typeface="メイリオ"/>
-                <a:cs typeface="メイリオ"/>
-              </a:rPr>
-              <a:t>「LINE限定 テスト対策プリント」</a:t>
-            </a:r>
-          </a:p>
-        </p:txBody>
-      </p:sp>
-      <p:cxnSp>
-        <p:nvCxnSpPr>
-          <p:cNvPr id="39" name="Connector 38"/>
-          <p:cNvCxnSpPr/>
-          <p:nvPr/>
-        </p:nvCxnSpPr>
-        <p:spPr>
-          <a:xfrm>
-            <a:off x="7865999" y="4347000"/>
-            <a:ext cx="198000" cy="0"/>
-          </a:xfrm>
-          <a:prstGeom prst="line">
-            <a:avLst/>
-          </a:prstGeom>
-          <a:ln w="31750">
-            <a:solidFill>
-              <a:srgbClr val="1F285A"/>
-            </a:solidFill>
-            <a:tailEnd type="triangle"/>
-          </a:ln>
-        </p:spPr>
-        <p:style>
-          <a:lnRef idx="2">
-            <a:schemeClr val="accent1"/>
-          </a:lnRef>
-          <a:fillRef idx="0">
-            <a:schemeClr val="accent1"/>
-          </a:fillRef>
-          <a:effectRef idx="1">
-            <a:schemeClr val="accent1"/>
-          </a:effectRef>
-          <a:fontRef idx="minor">
-            <a:schemeClr val="tx1"/>
-          </a:fontRef>
-        </p:style>
-      </p:cxnSp>
-      <p:sp>
-        <p:nvSpPr>
-          <p:cNvPr id="40" name="Rectangle 39"/>
-          <p:cNvSpPr/>
-          <p:nvPr/>
-        </p:nvSpPr>
-        <p:spPr>
-          <a:xfrm>
-            <a:off x="8082000" y="3906000"/>
-            <a:ext cx="1565999" cy="882000"/>
-          </a:xfrm>
-          <a:prstGeom prst="rect">
-            <a:avLst/>
+            <a:off x="432000" y="4824000"/>
+            <a:ext cx="11329200" cy="612000"/>
+          </a:xfrm>
+          <a:prstGeom prst="roundRect">
+            <a:avLst>
+              <a:gd name="adj" fmla="val 15000"/>
+            </a:avLst>
           </a:prstGeom>
           <a:solidFill>
             <a:srgbClr val="06C755"/>
@@ -6257,7 +5976,7 @@
           <a:p>
             <a:pPr algn="ctr"/>
             <a:r>
-              <a:rPr sz="2600" b="1">
+              <a:rPr sz="2400" b="1">
                 <a:solidFill>
                   <a:srgbClr val="FFFFFF"/>
                 </a:solidFill>
@@ -6265,148 +5984,20 @@
                 <a:ea typeface="メイリオ"/>
                 <a:cs typeface="メイリオ"/>
               </a:rPr>
-              <a:t>20人</a:t>
-            </a:r>
-          </a:p>
-          <a:p>
-            <a:pPr algn="ctr"/>
-            <a:r>
-              <a:rPr sz="1300" b="1">
-                <a:solidFill>
-                  <a:srgbClr val="FFFFFF"/>
-                </a:solidFill>
-                <a:latin typeface="メイリオ"/>
-                <a:ea typeface="メイリオ"/>
-                <a:cs typeface="メイリオ"/>
-              </a:rPr>
-              <a:t>／月</a:t>
-            </a:r>
-          </a:p>
-        </p:txBody>
-      </p:sp>
-      <p:sp>
-        <p:nvSpPr>
-          <p:cNvPr id="41" name="Rectangle 40"/>
+              <a:t>新しい友だち　合計 月2,500人</a:t>
+            </a:r>
+          </a:p>
+        </p:txBody>
+      </p:sp>
+      <p:sp>
+        <p:nvSpPr>
+          <p:cNvPr id="35" name="Rectangle 34"/>
           <p:cNvSpPr/>
           <p:nvPr/>
         </p:nvSpPr>
         <p:spPr>
           <a:xfrm>
-            <a:off x="9720000" y="3906000"/>
-            <a:ext cx="1969200" cy="882000"/>
-          </a:xfrm>
-          <a:prstGeom prst="rect">
-            <a:avLst/>
-          </a:prstGeom>
-          <a:solidFill>
-            <a:srgbClr val="FFFFFF"/>
-          </a:solidFill>
-          <a:ln w="15875">
-            <a:solidFill>
-              <a:srgbClr val="C9D3E6"/>
-            </a:solidFill>
-          </a:ln>
-          <a:effectLst/>
-        </p:spPr>
-        <p:style>
-          <a:lnRef idx="1">
-            <a:schemeClr val="accent1"/>
-          </a:lnRef>
-          <a:fillRef idx="3">
-            <a:schemeClr val="accent1"/>
-          </a:fillRef>
-          <a:effectRef idx="2">
-            <a:schemeClr val="accent1"/>
-          </a:effectRef>
-          <a:fontRef idx="minor">
-            <a:schemeClr val="lt1"/>
-          </a:fontRef>
-        </p:style>
-        <p:txBody>
-          <a:bodyPr rtlCol="0" anchor="ctr" wrap="square" lIns="90000" rIns="90000" tIns="18000" bIns="18000"/>
-          <a:lstStyle/>
-          <a:p>
-            <a:pPr algn="ctr"/>
-            <a:r>
-              <a:rPr sz="1400" b="0">
-                <a:solidFill>
-                  <a:srgbClr val="333333"/>
-                </a:solidFill>
-                <a:latin typeface="メイリオ"/>
-                <a:ea typeface="メイリオ"/>
-                <a:cs typeface="メイリオ"/>
-              </a:rPr>
-              <a:t>費用内</a:t>
-            </a:r>
-          </a:p>
-        </p:txBody>
-      </p:sp>
-      <p:sp>
-        <p:nvSpPr>
-          <p:cNvPr id="42" name="Rounded Rectangle 41"/>
-          <p:cNvSpPr/>
-          <p:nvPr/>
-        </p:nvSpPr>
-        <p:spPr>
-          <a:xfrm>
-            <a:off x="432000" y="4986000"/>
-            <a:ext cx="11329200" cy="576000"/>
-          </a:xfrm>
-          <a:prstGeom prst="roundRect">
-            <a:avLst>
-              <a:gd name="adj" fmla="val 15000"/>
-            </a:avLst>
-          </a:prstGeom>
-          <a:solidFill>
-            <a:srgbClr val="06C755"/>
-          </a:solidFill>
-          <a:ln>
-            <a:noFill/>
-          </a:ln>
-          <a:effectLst/>
-        </p:spPr>
-        <p:style>
-          <a:lnRef idx="1">
-            <a:schemeClr val="accent1"/>
-          </a:lnRef>
-          <a:fillRef idx="3">
-            <a:schemeClr val="accent1"/>
-          </a:fillRef>
-          <a:effectRef idx="2">
-            <a:schemeClr val="accent1"/>
-          </a:effectRef>
-          <a:fontRef idx="minor">
-            <a:schemeClr val="lt1"/>
-          </a:fontRef>
-        </p:style>
-        <p:txBody>
-          <a:bodyPr rtlCol="0" anchor="ctr" wrap="square" lIns="90000" rIns="90000" tIns="18000" bIns="18000"/>
-          <a:lstStyle/>
-          <a:p>
-            <a:pPr algn="ctr"/>
-            <a:r>
-              <a:rPr sz="2200" b="1">
-                <a:solidFill>
-                  <a:srgbClr val="FFFFFF"/>
-                </a:solidFill>
-                <a:latin typeface="メイリオ"/>
-                <a:ea typeface="メイリオ"/>
-                <a:cs typeface="メイリオ"/>
-              </a:rPr>
-              <a:t>新しい友だち　合計 月250人（1教室あたり）</a:t>
-            </a:r>
-          </a:p>
-        </p:txBody>
-      </p:sp>
-      <p:sp>
-        <p:nvSpPr>
-          <p:cNvPr id="43" name="Rectangle 42"/>
-          <p:cNvSpPr/>
-          <p:nvPr/>
-        </p:nvSpPr>
-        <p:spPr>
-          <a:xfrm>
-            <a:off x="432000" y="5706000"/>
+            <a:off x="432000" y="5616000"/>
             <a:ext cx="11329200" cy="576000"/>
           </a:xfrm>
           <a:prstGeom prst="rect">
@@ -7124,7 +6715,7 @@
                 <a:ea typeface="メイリオ"/>
                 <a:cs typeface="メイリオ"/>
               </a:rPr>
-              <a:t>※1教室あたりのモデル値。開封率・クリック率＝DYM SIMの係数（ステップ 72.5%×12%／企画 78%×10%）、CVR＝0.3〜1.0%。費用は月額費用内（講習時期の再案内のみ別途）</a:t>
+              <a:t>※本部アカウント1つのモデル値。開封率・クリック率＝DYM SIMの係数（ステップ 72.5%×12%／企画 78%×10%）、CVR＝0.3〜1.0%。件数は四捨五入。通知メッセージのみ別途費用</a:t>
             </a:r>
           </a:p>
         </p:txBody>
@@ -7232,7 +6823,7 @@
                 <a:ea typeface="メイリオ"/>
                 <a:cs typeface="メイリオ"/>
               </a:rPr>
-              <a:t>対象：新しい友だち 月250人</a:t>
+              <a:t>対象：新しい友だち 月2,500人</a:t>
             </a:r>
           </a:p>
         </p:txBody>
@@ -7401,7 +6992,7 @@
                 <a:ea typeface="メイリオ"/>
                 <a:cs typeface="メイリオ"/>
               </a:rPr>
-              <a:t>0.3件</a:t>
+              <a:t>3件</a:t>
             </a:r>
           </a:p>
           <a:p>
@@ -7468,7 +7059,7 @@
                 <a:ea typeface="メイリオ"/>
                 <a:cs typeface="メイリオ"/>
               </a:rPr>
-              <a:t>250人×100%×12%×1.0%</a:t>
+              <a:t>2,500人×100%×12%×1.0%</a:t>
             </a:r>
           </a:p>
         </p:txBody>
@@ -7704,7 +7295,7 @@
                 <a:ea typeface="メイリオ"/>
                 <a:cs typeface="メイリオ"/>
               </a:rPr>
-              <a:t>250人×72.5%×12%</a:t>
+              <a:t>2,500人×72.5%×12%</a:t>
             </a:r>
           </a:p>
         </p:txBody>
@@ -7873,7 +7464,7 @@
                 <a:ea typeface="メイリオ"/>
                 <a:cs typeface="メイリオ"/>
               </a:rPr>
-              <a:t>0.2件</a:t>
+              <a:t>2件</a:t>
             </a:r>
           </a:p>
           <a:p>
@@ -7940,7 +7531,7 @@
                 <a:ea typeface="メイリオ"/>
                 <a:cs typeface="メイリオ"/>
               </a:rPr>
-              <a:t>250人×72.5%×12%×1.0%</a:t>
+              <a:t>2,500人×72.5%×12%×1.0%</a:t>
             </a:r>
           </a:p>
         </p:txBody>
@@ -8109,7 +7700,7 @@
                 <a:ea typeface="メイリオ"/>
                 <a:cs typeface="メイリオ"/>
               </a:rPr>
-              <a:t>0.2件</a:t>
+              <a:t>2件</a:t>
             </a:r>
           </a:p>
           <a:p>
@@ -8176,7 +7767,7 @@
                 <a:ea typeface="メイリオ"/>
                 <a:cs typeface="メイリオ"/>
               </a:rPr>
-              <a:t>250人×72.5%×12%×0.8%</a:t>
+              <a:t>2,500人×72.5%×12%×0.8%</a:t>
             </a:r>
           </a:p>
         </p:txBody>
@@ -8345,7 +7936,7 @@
                 <a:ea typeface="メイリオ"/>
                 <a:cs typeface="メイリオ"/>
               </a:rPr>
-              <a:t>0.2件</a:t>
+              <a:t>2件</a:t>
             </a:r>
           </a:p>
           <a:p>
@@ -8412,7 +8003,7 @@
                 <a:ea typeface="メイリオ"/>
                 <a:cs typeface="メイリオ"/>
               </a:rPr>
-              <a:t>250人×72.5%×12%×1.0%</a:t>
+              <a:t>2,500人×72.5%×12%×1.0%</a:t>
             </a:r>
           </a:p>
         </p:txBody>
@@ -8467,7 +8058,7 @@
                 <a:ea typeface="メイリオ"/>
                 <a:cs typeface="メイリオ"/>
               </a:rPr>
-              <a:t>[企画配信]　月1〜2本</a:t>
+              <a:t>[企画配信]　時期に合わせて月1〜2本</a:t>
             </a:r>
           </a:p>
         </p:txBody>
@@ -8520,7 +8111,7 @@
                 <a:ea typeface="メイリオ"/>
                 <a:cs typeface="メイリオ"/>
               </a:rPr>
-              <a:t>対象：友だち 累計約1,000人（ブロックを除いて約680人）</a:t>
+              <a:t>対象：友だち 累計約10,000人（ブロックを除いて約6,800人）</a:t>
             </a:r>
           </a:p>
         </p:txBody>
@@ -8577,7 +8168,7 @@
                 <a:ea typeface="メイリオ"/>
                 <a:cs typeface="メイリオ"/>
               </a:rPr>
-              <a:t>講習の前</a:t>
+              <a:t>1〜2月</a:t>
             </a:r>
           </a:p>
         </p:txBody>
@@ -8634,7 +8225,7 @@
                 <a:ea typeface="メイリオ"/>
                 <a:cs typeface="メイリオ"/>
               </a:rPr>
-              <a:t>講習・新学年の先行案内</a:t>
+              <a:t>新学年で変わること（学年別）＋体験のご案内</a:t>
             </a:r>
           </a:p>
         </p:txBody>
@@ -8689,7 +8280,7 @@
                 <a:ea typeface="メイリオ"/>
                 <a:cs typeface="メイリオ"/>
               </a:rPr>
-              <a:t>0.5件</a:t>
+              <a:t>5件</a:t>
             </a:r>
           </a:p>
           <a:p>
@@ -8703,7 +8294,7 @@
                 <a:ea typeface="メイリオ"/>
                 <a:cs typeface="メイリオ"/>
               </a:rPr>
-              <a:t>CV② 体験・講習</a:t>
+              <a:t>CV② 体験予約</a:t>
             </a:r>
           </a:p>
         </p:txBody>
@@ -8756,7 +8347,7 @@
                 <a:ea typeface="メイリオ"/>
                 <a:cs typeface="メイリオ"/>
               </a:rPr>
-              <a:t>680人×78%×10%×1.0%</a:t>
+              <a:t>6,800人×78%×10%×1.0%</a:t>
             </a:r>
           </a:p>
         </p:txBody>
@@ -8813,7 +8404,7 @@
                 <a:ea typeface="メイリオ"/>
                 <a:cs typeface="メイリオ"/>
               </a:rPr>
-              <a:t>テストの前</a:t>
+              <a:t>6月</a:t>
             </a:r>
           </a:p>
         </p:txBody>
@@ -8870,7 +8461,7 @@
                 <a:ea typeface="メイリオ"/>
                 <a:cs typeface="メイリオ"/>
               </a:rPr>
-              <a:t>テスト対策講座のご案内（中学生の保護者）</a:t>
+              <a:t>夏期講習の早期申込特典＋無料体験</a:t>
             </a:r>
           </a:p>
         </p:txBody>
@@ -8925,7 +8516,7 @@
                 <a:ea typeface="メイリオ"/>
                 <a:cs typeface="メイリオ"/>
               </a:rPr>
-              <a:t>0.1件</a:t>
+              <a:t>5件</a:t>
             </a:r>
           </a:p>
           <a:p>
@@ -8992,7 +8583,7 @@
                 <a:ea typeface="メイリオ"/>
                 <a:cs typeface="メイリオ"/>
               </a:rPr>
-              <a:t>270人×78%×10%×0.5%</a:t>
+              <a:t>6,800人×78%×10%×1.0%</a:t>
             </a:r>
           </a:p>
         </p:txBody>
@@ -9049,7 +8640,7 @@
                 <a:ea typeface="メイリオ"/>
                 <a:cs typeface="メイリオ"/>
               </a:rPr>
-              <a:t>資料請求後</a:t>
+              <a:t>テスト後</a:t>
             </a:r>
           </a:p>
         </p:txBody>
@@ -9106,7 +8697,7 @@
                 <a:ea typeface="メイリオ"/>
                 <a:cs typeface="メイリオ"/>
               </a:rPr>
-              <a:t>事例・費用のQ&amp;A・教室の紹介</a:t>
+              <a:t>点数の見方＋苦手単元の無料チェック（中学生の保護者）</a:t>
             </a:r>
           </a:p>
         </p:txBody>
@@ -9126,7 +8717,7 @@
             <a:avLst/>
           </a:prstGeom>
           <a:solidFill>
-            <a:srgbClr val="F2F2F2"/>
+            <a:srgbClr val="00897B"/>
           </a:solidFill>
           <a:ln>
             <a:noFill/>
@@ -9153,15 +8744,15 @@
           <a:p>
             <a:pPr algn="ctr"/>
             <a:r>
-              <a:rPr sz="1300" b="1">
-                <a:solidFill>
-                  <a:srgbClr val="7F7F7F"/>
-                </a:solidFill>
-                <a:latin typeface="メイリオ"/>
-                <a:ea typeface="メイリオ"/>
-                <a:cs typeface="メイリオ"/>
-              </a:rPr>
-              <a:t>実績で計算</a:t>
+              <a:rPr sz="1800" b="1">
+                <a:solidFill>
+                  <a:srgbClr val="FFFFFF"/>
+                </a:solidFill>
+                <a:latin typeface="メイリオ"/>
+                <a:ea typeface="メイリオ"/>
+                <a:cs typeface="メイリオ"/>
+              </a:rPr>
+              <a:t>2件</a:t>
             </a:r>
           </a:p>
           <a:p>
@@ -9169,7 +8760,7 @@
             <a:r>
               <a:rPr sz="1050" b="1">
                 <a:solidFill>
-                  <a:srgbClr val="7F7F7F"/>
+                  <a:srgbClr val="FFFFFF"/>
                 </a:solidFill>
                 <a:latin typeface="メイリオ"/>
                 <a:ea typeface="メイリオ"/>
@@ -9228,7 +8819,7 @@
                 <a:ea typeface="メイリオ"/>
                 <a:cs typeface="メイリオ"/>
               </a:rPr>
-              <a:t>資料を請求した人</a:t>
+              <a:t>2,700人×78%×10%×0.8%</a:t>
             </a:r>
           </a:p>
         </p:txBody>
@@ -9285,7 +8876,7 @@
                 <a:ea typeface="メイリオ"/>
                 <a:cs typeface="メイリオ"/>
               </a:rPr>
-              <a:t>講習の時期</a:t>
+              <a:t>講習の前</a:t>
             </a:r>
           </a:p>
         </p:txBody>
@@ -9342,7 +8933,7 @@
                 <a:ea typeface="メイリオ"/>
                 <a:cs typeface="メイリオ"/>
               </a:rPr>
-              <a:t>体験・入会に至らなかった人へ再案内</a:t>
+              <a:t>体験・入会に至らなかった人へ再案内（通知メッセージ）</a:t>
             </a:r>
           </a:p>
         </p:txBody>
@@ -9411,7 +9002,7 @@
                 <a:ea typeface="メイリオ"/>
                 <a:cs typeface="メイリオ"/>
               </a:rPr>
-              <a:t>通知メッセージ</a:t>
+              <a:t>⑥再育成</a:t>
             </a:r>
           </a:p>
         </p:txBody>
@@ -9521,13 +9112,13 @@
                 <a:ea typeface="メイリオ"/>
                 <a:cs typeface="メイリオ"/>
               </a:rPr>
-              <a:t>1教室あたり月に　資料請求 約0.5件・体験予約 約1.0件</a:t>
+              <a:t>ステップ配信で毎月　資料請求 約5件・体験予約 約4件</a:t>
             </a:r>
           </a:p>
           <a:p>
             <a:pPr algn="ctr"/>
             <a:r>
-              <a:rPr sz="1400" b="0">
+              <a:rPr sz="1500" b="0">
                 <a:solidFill>
                   <a:srgbClr val="333333"/>
                 </a:solidFill>
@@ -9535,7 +9126,7 @@
                 <a:ea typeface="メイリオ"/>
                 <a:cs typeface="メイリオ"/>
               </a:rPr>
-              <a:t>100教室なら　資料請求 約50件・体験予約 約100件／月</a:t>
+              <a:t>企画配信は1回あたり　体験予約 2〜5件</a:t>
             </a:r>
           </a:p>
         </p:txBody>
@@ -10306,7 +9897,7 @@
                 <a:ea typeface="メイリオ"/>
                 <a:cs typeface="メイリオ"/>
               </a:rPr>
-              <a:t>料金・コース・駐車場などは、</a:t>
+              <a:t>料金・コース・対象学年などは、</a:t>
             </a:r>
           </a:p>
           <a:p>

--- a/教育（塾）業界_施策の設計図_16x9.pptx
+++ b/教育（塾）業界_施策の設計図_16x9.pptx
@@ -8404,7 +8404,7 @@
                 <a:ea typeface="メイリオ"/>
                 <a:cs typeface="メイリオ"/>
               </a:rPr>
-              <a:t>6月</a:t>
+              <a:t>5月</a:t>
             </a:r>
           </a:p>
         </p:txBody>
@@ -8461,7 +8461,7 @@
                 <a:ea typeface="メイリオ"/>
                 <a:cs typeface="メイリオ"/>
               </a:rPr>
-              <a:t>夏期講習の早期申込特典＋無料体験</a:t>
+              <a:t>中間テスト後（中学生の保護者）：点数の見方＋苦手単元チェック</a:t>
             </a:r>
           </a:p>
         </p:txBody>
@@ -8516,7 +8516,7 @@
                 <a:ea typeface="メイリオ"/>
                 <a:cs typeface="メイリオ"/>
               </a:rPr>
-              <a:t>5件</a:t>
+              <a:t>2件</a:t>
             </a:r>
           </a:p>
           <a:p>
@@ -8583,7 +8583,7 @@
                 <a:ea typeface="メイリオ"/>
                 <a:cs typeface="メイリオ"/>
               </a:rPr>
-              <a:t>6,800人×78%×10%×1.0%</a:t>
+              <a:t>2,700人×78%×10%×0.8%</a:t>
             </a:r>
           </a:p>
         </p:txBody>
@@ -8640,7 +8640,7 @@
                 <a:ea typeface="メイリオ"/>
                 <a:cs typeface="メイリオ"/>
               </a:rPr>
-              <a:t>テスト後</a:t>
+              <a:t>6月</a:t>
             </a:r>
           </a:p>
         </p:txBody>
@@ -8697,7 +8697,7 @@
                 <a:ea typeface="メイリオ"/>
                 <a:cs typeface="メイリオ"/>
               </a:rPr>
-              <a:t>点数の見方＋苦手単元の無料チェック（中学生の保護者）</a:t>
+              <a:t>夏期講習の早期申込特典＋無料体験</a:t>
             </a:r>
           </a:p>
         </p:txBody>
@@ -8752,7 +8752,7 @@
                 <a:ea typeface="メイリオ"/>
                 <a:cs typeface="メイリオ"/>
               </a:rPr>
-              <a:t>2件</a:t>
+              <a:t>5件</a:t>
             </a:r>
           </a:p>
           <a:p>
@@ -8819,7 +8819,7 @@
                 <a:ea typeface="メイリオ"/>
                 <a:cs typeface="メイリオ"/>
               </a:rPr>
-              <a:t>2,700人×78%×10%×0.8%</a:t>
+              <a:t>6,800人×78%×10%×1.0%</a:t>
             </a:r>
           </a:p>
         </p:txBody>
@@ -8876,7 +8876,7 @@
                 <a:ea typeface="メイリオ"/>
                 <a:cs typeface="メイリオ"/>
               </a:rPr>
-              <a:t>講習の前</a:t>
+              <a:t>10月</a:t>
             </a:r>
           </a:p>
         </p:txBody>
@@ -8933,7 +8933,7 @@
                 <a:ea typeface="メイリオ"/>
                 <a:cs typeface="メイリオ"/>
               </a:rPr>
-              <a:t>体験・入会に至らなかった人へ再案内（通知メッセージ）</a:t>
+              <a:t>2学期の中間テスト後＋冬期講習の早期案内</a:t>
             </a:r>
           </a:p>
         </p:txBody>
@@ -8947,6 +8947,242 @@
         <p:spPr>
           <a:xfrm>
             <a:off x="9997200" y="4248000"/>
+            <a:ext cx="1764000" cy="478800"/>
+          </a:xfrm>
+          <a:prstGeom prst="rect">
+            <a:avLst/>
+          </a:prstGeom>
+          <a:solidFill>
+            <a:srgbClr val="00897B"/>
+          </a:solidFill>
+          <a:ln>
+            <a:noFill/>
+          </a:ln>
+          <a:effectLst/>
+        </p:spPr>
+        <p:style>
+          <a:lnRef idx="1">
+            <a:schemeClr val="accent1"/>
+          </a:lnRef>
+          <a:fillRef idx="3">
+            <a:schemeClr val="accent1"/>
+          </a:fillRef>
+          <a:effectRef idx="2">
+            <a:schemeClr val="accent1"/>
+          </a:effectRef>
+          <a:fontRef idx="minor">
+            <a:schemeClr val="lt1"/>
+          </a:fontRef>
+        </p:style>
+        <p:txBody>
+          <a:bodyPr rtlCol="0" anchor="ctr" wrap="square" lIns="18000" rIns="18000" tIns="18000" bIns="18000"/>
+          <a:lstStyle/>
+          <a:p>
+            <a:pPr algn="ctr"/>
+            <a:r>
+              <a:rPr sz="1800" b="1">
+                <a:solidFill>
+                  <a:srgbClr val="FFFFFF"/>
+                </a:solidFill>
+                <a:latin typeface="メイリオ"/>
+                <a:ea typeface="メイリオ"/>
+                <a:cs typeface="メイリオ"/>
+              </a:rPr>
+              <a:t>3件</a:t>
+            </a:r>
+          </a:p>
+          <a:p>
+            <a:pPr algn="ctr"/>
+            <a:r>
+              <a:rPr sz="1050" b="1">
+                <a:solidFill>
+                  <a:srgbClr val="FFFFFF"/>
+                </a:solidFill>
+                <a:latin typeface="メイリオ"/>
+                <a:ea typeface="メイリオ"/>
+                <a:cs typeface="メイリオ"/>
+              </a:rPr>
+              <a:t>CV② 体験予約</a:t>
+            </a:r>
+          </a:p>
+        </p:txBody>
+      </p:sp>
+      <p:sp>
+        <p:nvSpPr>
+          <p:cNvPr id="53" name="Rectangle 52"/>
+          <p:cNvSpPr/>
+          <p:nvPr/>
+        </p:nvSpPr>
+        <p:spPr>
+          <a:xfrm>
+            <a:off x="9997200" y="4734000"/>
+            <a:ext cx="1764000" cy="144000"/>
+          </a:xfrm>
+          <a:prstGeom prst="rect">
+            <a:avLst/>
+          </a:prstGeom>
+          <a:noFill/>
+          <a:ln>
+            <a:noFill/>
+          </a:ln>
+          <a:effectLst/>
+        </p:spPr>
+        <p:style>
+          <a:lnRef idx="1">
+            <a:schemeClr val="accent1"/>
+          </a:lnRef>
+          <a:fillRef idx="3">
+            <a:schemeClr val="accent1"/>
+          </a:fillRef>
+          <a:effectRef idx="2">
+            <a:schemeClr val="accent1"/>
+          </a:effectRef>
+          <a:fontRef idx="minor">
+            <a:schemeClr val="lt1"/>
+          </a:fontRef>
+        </p:style>
+        <p:txBody>
+          <a:bodyPr rtlCol="0" anchor="t" wrap="square" lIns="18000" rIns="18000" tIns="18000" bIns="18000"/>
+          <a:lstStyle/>
+          <a:p>
+            <a:pPr algn="ctr"/>
+            <a:r>
+              <a:rPr sz="900" b="0">
+                <a:solidFill>
+                  <a:srgbClr val="7F7F7F"/>
+                </a:solidFill>
+                <a:latin typeface="メイリオ"/>
+                <a:ea typeface="メイリオ"/>
+                <a:cs typeface="メイリオ"/>
+              </a:rPr>
+              <a:t>6,800人×78%×10%×0.6%</a:t>
+            </a:r>
+          </a:p>
+        </p:txBody>
+      </p:sp>
+      <p:sp>
+        <p:nvSpPr>
+          <p:cNvPr id="54" name="Rectangle 53"/>
+          <p:cNvSpPr/>
+          <p:nvPr/>
+        </p:nvSpPr>
+        <p:spPr>
+          <a:xfrm>
+            <a:off x="6240600" y="4950000"/>
+            <a:ext cx="1072800" cy="630000"/>
+          </a:xfrm>
+          <a:prstGeom prst="rect">
+            <a:avLst/>
+          </a:prstGeom>
+          <a:solidFill>
+            <a:srgbClr val="F4F7FF"/>
+          </a:solidFill>
+          <a:ln w="15875">
+            <a:solidFill>
+              <a:srgbClr val="C9D3E6"/>
+            </a:solidFill>
+          </a:ln>
+          <a:effectLst/>
+        </p:spPr>
+        <p:style>
+          <a:lnRef idx="1">
+            <a:schemeClr val="accent1"/>
+          </a:lnRef>
+          <a:fillRef idx="3">
+            <a:schemeClr val="accent1"/>
+          </a:fillRef>
+          <a:effectRef idx="2">
+            <a:schemeClr val="accent1"/>
+          </a:effectRef>
+          <a:fontRef idx="minor">
+            <a:schemeClr val="lt1"/>
+          </a:fontRef>
+        </p:style>
+        <p:txBody>
+          <a:bodyPr rtlCol="0" anchor="ctr" wrap="square" lIns="18000" rIns="18000" tIns="18000" bIns="18000"/>
+          <a:lstStyle/>
+          <a:p>
+            <a:pPr algn="ctr"/>
+            <a:r>
+              <a:rPr sz="1500" b="1">
+                <a:solidFill>
+                  <a:srgbClr val="1F285A"/>
+                </a:solidFill>
+                <a:latin typeface="メイリオ"/>
+                <a:ea typeface="メイリオ"/>
+                <a:cs typeface="メイリオ"/>
+              </a:rPr>
+              <a:t>11月</a:t>
+            </a:r>
+          </a:p>
+        </p:txBody>
+      </p:sp>
+      <p:sp>
+        <p:nvSpPr>
+          <p:cNvPr id="55" name="Rectangle 54"/>
+          <p:cNvSpPr/>
+          <p:nvPr/>
+        </p:nvSpPr>
+        <p:spPr>
+          <a:xfrm>
+            <a:off x="7356600" y="4950000"/>
+            <a:ext cx="2597399" cy="630000"/>
+          </a:xfrm>
+          <a:prstGeom prst="rect">
+            <a:avLst/>
+          </a:prstGeom>
+          <a:solidFill>
+            <a:srgbClr val="FFFFFF"/>
+          </a:solidFill>
+          <a:ln w="15875">
+            <a:solidFill>
+              <a:srgbClr val="C9D3E6"/>
+            </a:solidFill>
+          </a:ln>
+          <a:effectLst/>
+        </p:spPr>
+        <p:style>
+          <a:lnRef idx="1">
+            <a:schemeClr val="accent1"/>
+          </a:lnRef>
+          <a:fillRef idx="3">
+            <a:schemeClr val="accent1"/>
+          </a:fillRef>
+          <a:effectRef idx="2">
+            <a:schemeClr val="accent1"/>
+          </a:effectRef>
+          <a:fontRef idx="minor">
+            <a:schemeClr val="lt1"/>
+          </a:fontRef>
+        </p:style>
+        <p:txBody>
+          <a:bodyPr rtlCol="0" anchor="ctr" wrap="square" lIns="108000" rIns="108000" tIns="18000" bIns="18000"/>
+          <a:lstStyle/>
+          <a:p>
+            <a:pPr algn="l"/>
+            <a:r>
+              <a:rPr sz="1400" b="0">
+                <a:solidFill>
+                  <a:srgbClr val="333333"/>
+                </a:solidFill>
+                <a:latin typeface="メイリオ"/>
+                <a:ea typeface="メイリオ"/>
+                <a:cs typeface="メイリオ"/>
+              </a:rPr>
+              <a:t>冬期講習の前：体験・入会に至らなかった人へ再案内</a:t>
+            </a:r>
+          </a:p>
+        </p:txBody>
+      </p:sp>
+      <p:sp>
+        <p:nvSpPr>
+          <p:cNvPr id="56" name="Rectangle 55"/>
+          <p:cNvSpPr/>
+          <p:nvPr/>
+        </p:nvSpPr>
+        <p:spPr>
+          <a:xfrm>
+            <a:off x="9997200" y="4950000"/>
             <a:ext cx="1764000" cy="478800"/>
           </a:xfrm>
           <a:prstGeom prst="rect">
@@ -9009,13 +9245,13 @@
       </p:sp>
       <p:sp>
         <p:nvSpPr>
-          <p:cNvPr id="53" name="Rectangle 52"/>
-          <p:cNvSpPr/>
-          <p:nvPr/>
-        </p:nvSpPr>
-        <p:spPr>
-          <a:xfrm>
-            <a:off x="9997200" y="4734000"/>
+          <p:cNvPr id="57" name="Rectangle 56"/>
+          <p:cNvSpPr/>
+          <p:nvPr/>
+        </p:nvSpPr>
+        <p:spPr>
+          <a:xfrm>
+            <a:off x="9997200" y="5436000"/>
             <a:ext cx="1764000" cy="144000"/>
           </a:xfrm>
           <a:prstGeom prst="rect">
@@ -9055,14 +9291,14 @@
                 <a:ea typeface="メイリオ"/>
                 <a:cs typeface="メイリオ"/>
               </a:rPr>
-              <a:t>別途費用</a:t>
-            </a:r>
-          </a:p>
-        </p:txBody>
-      </p:sp>
-      <p:sp>
-        <p:nvSpPr>
-          <p:cNvPr id="54" name="Rounded Rectangle 53"/>
+              <a:t>通知メッセージ・別途費用</a:t>
+            </a:r>
+          </a:p>
+        </p:txBody>
+      </p:sp>
+      <p:sp>
+        <p:nvSpPr>
+          <p:cNvPr id="58" name="Rounded Rectangle 57"/>
           <p:cNvSpPr/>
           <p:nvPr/>
         </p:nvSpPr>
@@ -9126,7 +9362,7 @@
                 <a:ea typeface="メイリオ"/>
                 <a:cs typeface="メイリオ"/>
               </a:rPr>
-              <a:t>企画配信は1回あたり　体験予約 2〜5件</a:t>
+              <a:t>企画配信は1回あたり　体験予約 2〜5件（年間の全体は別ページ）</a:t>
             </a:r>
           </a:p>
         </p:txBody>

--- a/教育（塾）業界_施策の設計図_16x9.pptx
+++ b/教育（塾）業界_施策の設計図_16x9.pptx
@@ -4773,7 +4773,7 @@
                 <a:ea typeface="メイリオ"/>
                 <a:cs typeface="メイリオ"/>
               </a:rPr>
-              <a:t>どこで、何を訴求して、月に何人がLINEの友だちになるか（中堅チェーンの本部アカウント1つのモデル値）</a:t>
+              <a:t>どこで、何を訴求して、月に何人がLINEの友だちになるか（大手1社・サイトUU 約28万／月のモデル値）</a:t>
             </a:r>
           </a:p>
         </p:txBody>
@@ -4861,7 +4861,7 @@
                 <a:ea typeface="メイリオ"/>
                 <a:cs typeface="メイリオ"/>
               </a:rPr>
-              <a:t>※友だち追加数は中堅チェーンの本部アカウント1つのモデル値（例）。チラシ・教室のQRは計測できないため数えていない。費用は税抜</a:t>
+              <a:t>※サイトUUは明光義塾の実数（283,668／月・SimilarWeb）を参考にしたモデル値。係数はDYM SIMの型。チラシ・教室のQRは計測できないため数えていない。費用は税抜</a:t>
             </a:r>
           </a:p>
         </p:txBody>
@@ -5446,6 +5446,59 @@
         </p:nvSpPr>
         <p:spPr>
           <a:xfrm>
+            <a:off x="3527999" y="2934000"/>
+            <a:ext cx="4284000" cy="216000"/>
+          </a:xfrm>
+          <a:prstGeom prst="rect">
+            <a:avLst/>
+          </a:prstGeom>
+          <a:noFill/>
+          <a:ln>
+            <a:noFill/>
+          </a:ln>
+          <a:effectLst/>
+        </p:spPr>
+        <p:style>
+          <a:lnRef idx="1">
+            <a:schemeClr val="accent1"/>
+          </a:lnRef>
+          <a:fillRef idx="3">
+            <a:schemeClr val="accent1"/>
+          </a:fillRef>
+          <a:effectRef idx="2">
+            <a:schemeClr val="accent1"/>
+          </a:effectRef>
+          <a:fontRef idx="minor">
+            <a:schemeClr val="lt1"/>
+          </a:fontRef>
+        </p:style>
+        <p:txBody>
+          <a:bodyPr rtlCol="0" anchor="t" wrap="square" lIns="18000" rIns="18000" tIns="18000" bIns="18000"/>
+          <a:lstStyle/>
+          <a:p>
+            <a:pPr algn="l"/>
+            <a:r>
+              <a:rPr sz="1050" b="0">
+                <a:solidFill>
+                  <a:srgbClr val="7F7F7F"/>
+                </a:solidFill>
+                <a:latin typeface="メイリオ"/>
+                <a:ea typeface="メイリオ"/>
+                <a:cs typeface="メイリオ"/>
+              </a:rPr>
+              <a:t>28.4万UU×表示55%×クリック12%×追加12%</a:t>
+            </a:r>
+          </a:p>
+        </p:txBody>
+      </p:sp>
+      <p:sp>
+        <p:nvSpPr>
+          <p:cNvPr id="26" name="Rectangle 25"/>
+          <p:cNvSpPr/>
+          <p:nvPr/>
+        </p:nvSpPr>
+        <p:spPr>
+          <a:xfrm>
             <a:off x="9720000" y="1944000"/>
             <a:ext cx="1969200" cy="1260000"/>
           </a:xfrm>
@@ -5511,7 +5564,7 @@
       </p:sp>
       <p:sp>
         <p:nvSpPr>
-          <p:cNvPr id="26" name="Rectangle 25"/>
+          <p:cNvPr id="27" name="Rectangle 26"/>
           <p:cNvSpPr/>
           <p:nvPr/>
         </p:nvSpPr>
@@ -5557,7 +5610,7 @@
       </p:sp>
       <p:sp>
         <p:nvSpPr>
-          <p:cNvPr id="27" name="Oval 26"/>
+          <p:cNvPr id="28" name="Oval 27"/>
           <p:cNvSpPr/>
           <p:nvPr/>
         </p:nvSpPr>
@@ -5612,7 +5665,7 @@
       </p:sp>
       <p:sp>
         <p:nvSpPr>
-          <p:cNvPr id="28" name="Rectangle 27"/>
+          <p:cNvPr id="29" name="Rectangle 28"/>
           <p:cNvSpPr/>
           <p:nvPr/>
         </p:nvSpPr>
@@ -5665,7 +5718,7 @@
       </p:sp>
       <p:cxnSp>
         <p:nvCxnSpPr>
-          <p:cNvPr id="29" name="Connector 28"/>
+          <p:cNvPr id="30" name="Connector 29"/>
           <p:cNvCxnSpPr/>
           <p:nvPr/>
         </p:nvCxnSpPr>
@@ -5701,7 +5754,7 @@
       </p:cxnSp>
       <p:sp>
         <p:nvSpPr>
-          <p:cNvPr id="30" name="Rectangle 29"/>
+          <p:cNvPr id="31" name="Rectangle 30"/>
           <p:cNvSpPr/>
           <p:nvPr/>
         </p:nvSpPr>
@@ -5758,7 +5811,7 @@
       </p:sp>
       <p:cxnSp>
         <p:nvCxnSpPr>
-          <p:cNvPr id="31" name="Connector 30"/>
+          <p:cNvPr id="32" name="Connector 31"/>
           <p:cNvCxnSpPr/>
           <p:nvPr/>
         </p:nvCxnSpPr>
@@ -5794,7 +5847,7 @@
       </p:cxnSp>
       <p:sp>
         <p:nvSpPr>
-          <p:cNvPr id="32" name="Rectangle 31"/>
+          <p:cNvPr id="33" name="Rectangle 32"/>
           <p:cNvSpPr/>
           <p:nvPr/>
         </p:nvSpPr>
@@ -5863,7 +5916,60 @@
       </p:sp>
       <p:sp>
         <p:nvSpPr>
-          <p:cNvPr id="33" name="Rectangle 32"/>
+          <p:cNvPr id="34" name="Rectangle 33"/>
+          <p:cNvSpPr/>
+          <p:nvPr/>
+        </p:nvSpPr>
+        <p:spPr>
+          <a:xfrm>
+            <a:off x="3527999" y="4338000"/>
+            <a:ext cx="4284000" cy="216000"/>
+          </a:xfrm>
+          <a:prstGeom prst="rect">
+            <a:avLst/>
+          </a:prstGeom>
+          <a:noFill/>
+          <a:ln>
+            <a:noFill/>
+          </a:ln>
+          <a:effectLst/>
+        </p:spPr>
+        <p:style>
+          <a:lnRef idx="1">
+            <a:schemeClr val="accent1"/>
+          </a:lnRef>
+          <a:fillRef idx="3">
+            <a:schemeClr val="accent1"/>
+          </a:fillRef>
+          <a:effectRef idx="2">
+            <a:schemeClr val="accent1"/>
+          </a:effectRef>
+          <a:fontRef idx="minor">
+            <a:schemeClr val="lt1"/>
+          </a:fontRef>
+        </p:style>
+        <p:txBody>
+          <a:bodyPr rtlCol="0" anchor="t" wrap="square" lIns="18000" rIns="18000" tIns="18000" bIns="18000"/>
+          <a:lstStyle/>
+          <a:p>
+            <a:pPr algn="l"/>
+            <a:r>
+              <a:rPr sz="1050" b="0">
+                <a:solidFill>
+                  <a:srgbClr val="7F7F7F"/>
+                </a:solidFill>
+                <a:latin typeface="メイリオ"/>
+                <a:ea typeface="メイリオ"/>
+                <a:cs typeface="メイリオ"/>
+              </a:rPr>
+              <a:t>資料請求・体験予約の完了 月2,000件×15%</a:t>
+            </a:r>
+          </a:p>
+        </p:txBody>
+      </p:sp>
+      <p:sp>
+        <p:nvSpPr>
+          <p:cNvPr id="35" name="Rectangle 34"/>
           <p:cNvSpPr/>
           <p:nvPr/>
         </p:nvSpPr>
@@ -5934,7 +6040,7 @@
       </p:sp>
       <p:sp>
         <p:nvSpPr>
-          <p:cNvPr id="34" name="Rounded Rectangle 33"/>
+          <p:cNvPr id="36" name="Rounded Rectangle 35"/>
           <p:cNvSpPr/>
           <p:nvPr/>
         </p:nvSpPr>
@@ -5991,7 +6097,7 @@
       </p:sp>
       <p:sp>
         <p:nvSpPr>
-          <p:cNvPr id="35" name="Rectangle 34"/>
+          <p:cNvPr id="37" name="Rectangle 36"/>
           <p:cNvSpPr/>
           <p:nvPr/>
         </p:nvSpPr>
@@ -6715,7 +6821,7 @@
                 <a:ea typeface="メイリオ"/>
                 <a:cs typeface="メイリオ"/>
               </a:rPr>
-              <a:t>※本部アカウント1つのモデル値。開封率・クリック率＝DYM SIMの係数（ステップ 72.5%×12%／企画 78%×10%）、CVR＝0.3〜1.0%。件数は四捨五入。通知メッセージのみ別途費用</a:t>
+              <a:t>※大手1社（サイトUU 約28万／月）のモデル値。開封率・クリック率＝DYM SIMの係数（ステップ 72.5%×12%／企画 78%×10%）、CVR＝0.3〜1.0%。件数は四捨五入。通知メッセージのみ別途費用</a:t>
             </a:r>
           </a:p>
         </p:txBody>

--- a/教育（塾）業界_施策の設計図_16x9.pptx
+++ b/教育（塾）業界_施策の設計図_16x9.pptx
@@ -4861,7 +4861,7 @@
                 <a:ea typeface="メイリオ"/>
                 <a:cs typeface="メイリオ"/>
               </a:rPr>
-              <a:t>※サイトUUは明光義塾の実数（283,668／月・SimilarWeb）を参考にしたモデル値。係数はDYM SIMの型。チラシ・教室のQRは計測できないため数えていない。費用は税抜</a:t>
+              <a:t>※サイトUUは大手の有名塾の実数（SimilarWeb）を参考にしたモデル値。係数はDYM SIMの型。チラシ・教室のQRは計測できないため数えていない。費用は税抜</a:t>
             </a:r>
           </a:p>
         </p:txBody>
